--- a/ADS/PPTs/Specl Tree.pptx
+++ b/ADS/PPTs/Specl Tree.pptx
@@ -1,23 +1,23 @@
 
 <file path=ppt/presentation.xml><?xml version="1.0" encoding="utf-8"?>
-<p:presentation xmlns:a="http://schemas.openxmlformats.org/drawingml/2006/main" xmlns:r="http://schemas.openxmlformats.org/officeDocument/2006/relationships" xmlns:p="http://schemas.openxmlformats.org/presentationml/2006/main" saveSubsetFonts="1">
+<p:presentation xmlns:a="http://schemas.openxmlformats.org/drawingml/2006/main" xmlns:r="http://schemas.openxmlformats.org/officeDocument/2006/relationships" xmlns:p="http://schemas.openxmlformats.org/presentationml/2006/main">
   <p:sldMasterIdLst>
     <p:sldMasterId id="2147483648" r:id="rId1"/>
   </p:sldMasterIdLst>
   <p:sldIdLst>
-    <p:sldId id="256" r:id="rId2"/>
-    <p:sldId id="257" r:id="rId3"/>
-    <p:sldId id="267" r:id="rId4"/>
-    <p:sldId id="269" r:id="rId5"/>
-    <p:sldId id="258" r:id="rId6"/>
-    <p:sldId id="259" r:id="rId7"/>
-    <p:sldId id="260" r:id="rId8"/>
-    <p:sldId id="262" r:id="rId9"/>
-    <p:sldId id="261" r:id="rId10"/>
-    <p:sldId id="263" r:id="rId11"/>
-    <p:sldId id="264" r:id="rId12"/>
-    <p:sldId id="265" r:id="rId13"/>
-    <p:sldId id="266" r:id="rId14"/>
+    <p:sldId id="256" r:id="rId3"/>
+    <p:sldId id="257" r:id="rId4"/>
+    <p:sldId id="267" r:id="rId5"/>
+    <p:sldId id="269" r:id="rId6"/>
+    <p:sldId id="258" r:id="rId7"/>
+    <p:sldId id="259" r:id="rId8"/>
+    <p:sldId id="260" r:id="rId9"/>
+    <p:sldId id="262" r:id="rId10"/>
+    <p:sldId id="261" r:id="rId11"/>
+    <p:sldId id="263" r:id="rId12"/>
+    <p:sldId id="264" r:id="rId13"/>
+    <p:sldId id="265" r:id="rId14"/>
+    <p:sldId id="266" r:id="rId15"/>
   </p:sldIdLst>
   <p:sldSz cx="12192000" cy="6858000"/>
   <p:notesSz cx="6858000" cy="9144000"/>
@@ -116,11 +116,6 @@
       </a:defRPr>
     </a:lvl9pPr>
   </p:defaultTextStyle>
-  <p:extLst>
-    <p:ext uri="{EFAFB233-063F-42B5-8137-9DF3F51BA10A}">
-      <p15:sldGuideLst xmlns:p15="http://schemas.microsoft.com/office/powerpoint/2012/main"/>
-    </p:ext>
-  </p:extLst>
 </p:presentation>
 </file>
 
@@ -255,7 +250,6 @@
           <a:p>
             <a:fld id="{F159289A-40E8-449E-A33B-812DC283330B}" type="datetimeFigureOut">
               <a:rPr lang="en-US" smtClean="0"/>
-              <a:t>8/27/2026</a:t>
             </a:fld>
             <a:endParaRPr lang="en-US"/>
           </a:p>
@@ -297,18 +291,12 @@
           <a:p>
             <a:fld id="{C41D03B5-021B-42A0-8C9C-7110F2DC2D7F}" type="slidenum">
               <a:rPr lang="en-US" smtClean="0"/>
-              <a:t>‹#›</a:t>
             </a:fld>
             <a:endParaRPr lang="en-US"/>
           </a:p>
         </p:txBody>
       </p:sp>
     </p:spTree>
-    <p:extLst>
-      <p:ext uri="{BB962C8B-B14F-4D97-AF65-F5344CB8AC3E}">
-        <p14:creationId xmlns:p14="http://schemas.microsoft.com/office/powerpoint/2010/main" val="120091995"/>
-      </p:ext>
-    </p:extLst>
   </p:cSld>
   <p:clrMapOvr>
     <a:masterClrMapping/>
@@ -376,6 +364,7 @@
               <a:rPr lang="en-US" smtClean="0"/>
               <a:t>Click to edit Master text styles</a:t>
             </a:r>
+            <a:endParaRPr lang="en-US" smtClean="0"/>
           </a:p>
           <a:p>
             <a:pPr lvl="1"/>
@@ -383,6 +372,7 @@
               <a:rPr lang="en-US" smtClean="0"/>
               <a:t>Second level</a:t>
             </a:r>
+            <a:endParaRPr lang="en-US" smtClean="0"/>
           </a:p>
           <a:p>
             <a:pPr lvl="2"/>
@@ -390,6 +380,7 @@
               <a:rPr lang="en-US" smtClean="0"/>
               <a:t>Third level</a:t>
             </a:r>
+            <a:endParaRPr lang="en-US" smtClean="0"/>
           </a:p>
           <a:p>
             <a:pPr lvl="3"/>
@@ -397,6 +388,7 @@
               <a:rPr lang="en-US" smtClean="0"/>
               <a:t>Fourth level</a:t>
             </a:r>
+            <a:endParaRPr lang="en-US" smtClean="0"/>
           </a:p>
           <a:p>
             <a:pPr lvl="4"/>
@@ -425,7 +417,6 @@
           <a:p>
             <a:fld id="{F159289A-40E8-449E-A33B-812DC283330B}" type="datetimeFigureOut">
               <a:rPr lang="en-US" smtClean="0"/>
-              <a:t>8/27/2026</a:t>
             </a:fld>
             <a:endParaRPr lang="en-US"/>
           </a:p>
@@ -467,18 +458,12 @@
           <a:p>
             <a:fld id="{C41D03B5-021B-42A0-8C9C-7110F2DC2D7F}" type="slidenum">
               <a:rPr lang="en-US" smtClean="0"/>
-              <a:t>‹#›</a:t>
             </a:fld>
             <a:endParaRPr lang="en-US"/>
           </a:p>
         </p:txBody>
       </p:sp>
     </p:spTree>
-    <p:extLst>
-      <p:ext uri="{BB962C8B-B14F-4D97-AF65-F5344CB8AC3E}">
-        <p14:creationId xmlns:p14="http://schemas.microsoft.com/office/powerpoint/2010/main" val="255797011"/>
-      </p:ext>
-    </p:extLst>
   </p:cSld>
   <p:clrMapOvr>
     <a:masterClrMapping/>
@@ -556,6 +541,7 @@
               <a:rPr lang="en-US" smtClean="0"/>
               <a:t>Click to edit Master text styles</a:t>
             </a:r>
+            <a:endParaRPr lang="en-US" smtClean="0"/>
           </a:p>
           <a:p>
             <a:pPr lvl="1"/>
@@ -563,6 +549,7 @@
               <a:rPr lang="en-US" smtClean="0"/>
               <a:t>Second level</a:t>
             </a:r>
+            <a:endParaRPr lang="en-US" smtClean="0"/>
           </a:p>
           <a:p>
             <a:pPr lvl="2"/>
@@ -570,6 +557,7 @@
               <a:rPr lang="en-US" smtClean="0"/>
               <a:t>Third level</a:t>
             </a:r>
+            <a:endParaRPr lang="en-US" smtClean="0"/>
           </a:p>
           <a:p>
             <a:pPr lvl="3"/>
@@ -577,6 +565,7 @@
               <a:rPr lang="en-US" smtClean="0"/>
               <a:t>Fourth level</a:t>
             </a:r>
+            <a:endParaRPr lang="en-US" smtClean="0"/>
           </a:p>
           <a:p>
             <a:pPr lvl="4"/>
@@ -605,7 +594,6 @@
           <a:p>
             <a:fld id="{F159289A-40E8-449E-A33B-812DC283330B}" type="datetimeFigureOut">
               <a:rPr lang="en-US" smtClean="0"/>
-              <a:t>8/27/2026</a:t>
             </a:fld>
             <a:endParaRPr lang="en-US"/>
           </a:p>
@@ -647,18 +635,12 @@
           <a:p>
             <a:fld id="{C41D03B5-021B-42A0-8C9C-7110F2DC2D7F}" type="slidenum">
               <a:rPr lang="en-US" smtClean="0"/>
-              <a:t>‹#›</a:t>
             </a:fld>
             <a:endParaRPr lang="en-US"/>
           </a:p>
         </p:txBody>
       </p:sp>
     </p:spTree>
-    <p:extLst>
-      <p:ext uri="{BB962C8B-B14F-4D97-AF65-F5344CB8AC3E}">
-        <p14:creationId xmlns:p14="http://schemas.microsoft.com/office/powerpoint/2010/main" val="3866228717"/>
-      </p:ext>
-    </p:extLst>
   </p:cSld>
   <p:clrMapOvr>
     <a:masterClrMapping/>
@@ -726,6 +708,7 @@
               <a:rPr lang="en-US" smtClean="0"/>
               <a:t>Click to edit Master text styles</a:t>
             </a:r>
+            <a:endParaRPr lang="en-US" smtClean="0"/>
           </a:p>
           <a:p>
             <a:pPr lvl="1"/>
@@ -733,6 +716,7 @@
               <a:rPr lang="en-US" smtClean="0"/>
               <a:t>Second level</a:t>
             </a:r>
+            <a:endParaRPr lang="en-US" smtClean="0"/>
           </a:p>
           <a:p>
             <a:pPr lvl="2"/>
@@ -740,6 +724,7 @@
               <a:rPr lang="en-US" smtClean="0"/>
               <a:t>Third level</a:t>
             </a:r>
+            <a:endParaRPr lang="en-US" smtClean="0"/>
           </a:p>
           <a:p>
             <a:pPr lvl="3"/>
@@ -747,6 +732,7 @@
               <a:rPr lang="en-US" smtClean="0"/>
               <a:t>Fourth level</a:t>
             </a:r>
+            <a:endParaRPr lang="en-US" smtClean="0"/>
           </a:p>
           <a:p>
             <a:pPr lvl="4"/>
@@ -775,7 +761,6 @@
           <a:p>
             <a:fld id="{F159289A-40E8-449E-A33B-812DC283330B}" type="datetimeFigureOut">
               <a:rPr lang="en-US" smtClean="0"/>
-              <a:t>8/27/2026</a:t>
             </a:fld>
             <a:endParaRPr lang="en-US"/>
           </a:p>
@@ -817,18 +802,12 @@
           <a:p>
             <a:fld id="{C41D03B5-021B-42A0-8C9C-7110F2DC2D7F}" type="slidenum">
               <a:rPr lang="en-US" smtClean="0"/>
-              <a:t>‹#›</a:t>
             </a:fld>
             <a:endParaRPr lang="en-US"/>
           </a:p>
         </p:txBody>
       </p:sp>
     </p:spTree>
-    <p:extLst>
-      <p:ext uri="{BB962C8B-B14F-4D97-AF65-F5344CB8AC3E}">
-        <p14:creationId xmlns:p14="http://schemas.microsoft.com/office/powerpoint/2010/main" val="1937353798"/>
-      </p:ext>
-    </p:extLst>
   </p:cSld>
   <p:clrMapOvr>
     <a:masterClrMapping/>
@@ -1001,6 +980,7 @@
               <a:rPr lang="en-US" smtClean="0"/>
               <a:t>Click to edit Master text styles</a:t>
             </a:r>
+            <a:endParaRPr lang="en-US" smtClean="0"/>
           </a:p>
         </p:txBody>
       </p:sp>
@@ -1021,7 +1001,6 @@
           <a:p>
             <a:fld id="{F159289A-40E8-449E-A33B-812DC283330B}" type="datetimeFigureOut">
               <a:rPr lang="en-US" smtClean="0"/>
-              <a:t>8/27/2026</a:t>
             </a:fld>
             <a:endParaRPr lang="en-US"/>
           </a:p>
@@ -1063,18 +1042,12 @@
           <a:p>
             <a:fld id="{C41D03B5-021B-42A0-8C9C-7110F2DC2D7F}" type="slidenum">
               <a:rPr lang="en-US" smtClean="0"/>
-              <a:t>‹#›</a:t>
             </a:fld>
             <a:endParaRPr lang="en-US"/>
           </a:p>
         </p:txBody>
       </p:sp>
     </p:spTree>
-    <p:extLst>
-      <p:ext uri="{BB962C8B-B14F-4D97-AF65-F5344CB8AC3E}">
-        <p14:creationId xmlns:p14="http://schemas.microsoft.com/office/powerpoint/2010/main" val="1181938609"/>
-      </p:ext>
-    </p:extLst>
   </p:cSld>
   <p:clrMapOvr>
     <a:masterClrMapping/>
@@ -1147,6 +1120,7 @@
               <a:rPr lang="en-US" smtClean="0"/>
               <a:t>Click to edit Master text styles</a:t>
             </a:r>
+            <a:endParaRPr lang="en-US" smtClean="0"/>
           </a:p>
           <a:p>
             <a:pPr lvl="1"/>
@@ -1154,6 +1128,7 @@
               <a:rPr lang="en-US" smtClean="0"/>
               <a:t>Second level</a:t>
             </a:r>
+            <a:endParaRPr lang="en-US" smtClean="0"/>
           </a:p>
           <a:p>
             <a:pPr lvl="2"/>
@@ -1161,6 +1136,7 @@
               <a:rPr lang="en-US" smtClean="0"/>
               <a:t>Third level</a:t>
             </a:r>
+            <a:endParaRPr lang="en-US" smtClean="0"/>
           </a:p>
           <a:p>
             <a:pPr lvl="3"/>
@@ -1168,6 +1144,7 @@
               <a:rPr lang="en-US" smtClean="0"/>
               <a:t>Fourth level</a:t>
             </a:r>
+            <a:endParaRPr lang="en-US" smtClean="0"/>
           </a:p>
           <a:p>
             <a:pPr lvl="4"/>
@@ -1204,6 +1181,7 @@
               <a:rPr lang="en-US" smtClean="0"/>
               <a:t>Click to edit Master text styles</a:t>
             </a:r>
+            <a:endParaRPr lang="en-US" smtClean="0"/>
           </a:p>
           <a:p>
             <a:pPr lvl="1"/>
@@ -1211,6 +1189,7 @@
               <a:rPr lang="en-US" smtClean="0"/>
               <a:t>Second level</a:t>
             </a:r>
+            <a:endParaRPr lang="en-US" smtClean="0"/>
           </a:p>
           <a:p>
             <a:pPr lvl="2"/>
@@ -1218,6 +1197,7 @@
               <a:rPr lang="en-US" smtClean="0"/>
               <a:t>Third level</a:t>
             </a:r>
+            <a:endParaRPr lang="en-US" smtClean="0"/>
           </a:p>
           <a:p>
             <a:pPr lvl="3"/>
@@ -1225,6 +1205,7 @@
               <a:rPr lang="en-US" smtClean="0"/>
               <a:t>Fourth level</a:t>
             </a:r>
+            <a:endParaRPr lang="en-US" smtClean="0"/>
           </a:p>
           <a:p>
             <a:pPr lvl="4"/>
@@ -1253,7 +1234,6 @@
           <a:p>
             <a:fld id="{F159289A-40E8-449E-A33B-812DC283330B}" type="datetimeFigureOut">
               <a:rPr lang="en-US" smtClean="0"/>
-              <a:t>8/27/2026</a:t>
             </a:fld>
             <a:endParaRPr lang="en-US"/>
           </a:p>
@@ -1295,18 +1275,12 @@
           <a:p>
             <a:fld id="{C41D03B5-021B-42A0-8C9C-7110F2DC2D7F}" type="slidenum">
               <a:rPr lang="en-US" smtClean="0"/>
-              <a:t>‹#›</a:t>
             </a:fld>
             <a:endParaRPr lang="en-US"/>
           </a:p>
         </p:txBody>
       </p:sp>
     </p:spTree>
-    <p:extLst>
-      <p:ext uri="{BB962C8B-B14F-4D97-AF65-F5344CB8AC3E}">
-        <p14:creationId xmlns:p14="http://schemas.microsoft.com/office/powerpoint/2010/main" val="270881902"/>
-      </p:ext>
-    </p:extLst>
   </p:cSld>
   <p:clrMapOvr>
     <a:masterClrMapping/>
@@ -1421,6 +1395,7 @@
               <a:rPr lang="en-US" smtClean="0"/>
               <a:t>Click to edit Master text styles</a:t>
             </a:r>
+            <a:endParaRPr lang="en-US" smtClean="0"/>
           </a:p>
         </p:txBody>
       </p:sp>
@@ -1449,6 +1424,7 @@
               <a:rPr lang="en-US" smtClean="0"/>
               <a:t>Click to edit Master text styles</a:t>
             </a:r>
+            <a:endParaRPr lang="en-US" smtClean="0"/>
           </a:p>
           <a:p>
             <a:pPr lvl="1"/>
@@ -1456,6 +1432,7 @@
               <a:rPr lang="en-US" smtClean="0"/>
               <a:t>Second level</a:t>
             </a:r>
+            <a:endParaRPr lang="en-US" smtClean="0"/>
           </a:p>
           <a:p>
             <a:pPr lvl="2"/>
@@ -1463,6 +1440,7 @@
               <a:rPr lang="en-US" smtClean="0"/>
               <a:t>Third level</a:t>
             </a:r>
+            <a:endParaRPr lang="en-US" smtClean="0"/>
           </a:p>
           <a:p>
             <a:pPr lvl="3"/>
@@ -1470,6 +1448,7 @@
               <a:rPr lang="en-US" smtClean="0"/>
               <a:t>Fourth level</a:t>
             </a:r>
+            <a:endParaRPr lang="en-US" smtClean="0"/>
           </a:p>
           <a:p>
             <a:pPr lvl="4"/>
@@ -1543,6 +1522,7 @@
               <a:rPr lang="en-US" smtClean="0"/>
               <a:t>Click to edit Master text styles</a:t>
             </a:r>
+            <a:endParaRPr lang="en-US" smtClean="0"/>
           </a:p>
         </p:txBody>
       </p:sp>
@@ -1571,6 +1551,7 @@
               <a:rPr lang="en-US" smtClean="0"/>
               <a:t>Click to edit Master text styles</a:t>
             </a:r>
+            <a:endParaRPr lang="en-US" smtClean="0"/>
           </a:p>
           <a:p>
             <a:pPr lvl="1"/>
@@ -1578,6 +1559,7 @@
               <a:rPr lang="en-US" smtClean="0"/>
               <a:t>Second level</a:t>
             </a:r>
+            <a:endParaRPr lang="en-US" smtClean="0"/>
           </a:p>
           <a:p>
             <a:pPr lvl="2"/>
@@ -1585,6 +1567,7 @@
               <a:rPr lang="en-US" smtClean="0"/>
               <a:t>Third level</a:t>
             </a:r>
+            <a:endParaRPr lang="en-US" smtClean="0"/>
           </a:p>
           <a:p>
             <a:pPr lvl="3"/>
@@ -1592,6 +1575,7 @@
               <a:rPr lang="en-US" smtClean="0"/>
               <a:t>Fourth level</a:t>
             </a:r>
+            <a:endParaRPr lang="en-US" smtClean="0"/>
           </a:p>
           <a:p>
             <a:pPr lvl="4"/>
@@ -1620,7 +1604,6 @@
           <a:p>
             <a:fld id="{F159289A-40E8-449E-A33B-812DC283330B}" type="datetimeFigureOut">
               <a:rPr lang="en-US" smtClean="0"/>
-              <a:t>8/27/2026</a:t>
             </a:fld>
             <a:endParaRPr lang="en-US"/>
           </a:p>
@@ -1662,18 +1645,12 @@
           <a:p>
             <a:fld id="{C41D03B5-021B-42A0-8C9C-7110F2DC2D7F}" type="slidenum">
               <a:rPr lang="en-US" smtClean="0"/>
-              <a:t>‹#›</a:t>
             </a:fld>
             <a:endParaRPr lang="en-US"/>
           </a:p>
         </p:txBody>
       </p:sp>
     </p:spTree>
-    <p:extLst>
-      <p:ext uri="{BB962C8B-B14F-4D97-AF65-F5344CB8AC3E}">
-        <p14:creationId xmlns:p14="http://schemas.microsoft.com/office/powerpoint/2010/main" val="1442839286"/>
-      </p:ext>
-    </p:extLst>
   </p:cSld>
   <p:clrMapOvr>
     <a:masterClrMapping/>
@@ -1738,7 +1715,6 @@
           <a:p>
             <a:fld id="{F159289A-40E8-449E-A33B-812DC283330B}" type="datetimeFigureOut">
               <a:rPr lang="en-US" smtClean="0"/>
-              <a:t>8/27/2026</a:t>
             </a:fld>
             <a:endParaRPr lang="en-US"/>
           </a:p>
@@ -1780,18 +1756,12 @@
           <a:p>
             <a:fld id="{C41D03B5-021B-42A0-8C9C-7110F2DC2D7F}" type="slidenum">
               <a:rPr lang="en-US" smtClean="0"/>
-              <a:t>‹#›</a:t>
             </a:fld>
             <a:endParaRPr lang="en-US"/>
           </a:p>
         </p:txBody>
       </p:sp>
     </p:spTree>
-    <p:extLst>
-      <p:ext uri="{BB962C8B-B14F-4D97-AF65-F5344CB8AC3E}">
-        <p14:creationId xmlns:p14="http://schemas.microsoft.com/office/powerpoint/2010/main" val="2679254124"/>
-      </p:ext>
-    </p:extLst>
   </p:cSld>
   <p:clrMapOvr>
     <a:masterClrMapping/>
@@ -1833,7 +1803,6 @@
           <a:p>
             <a:fld id="{F159289A-40E8-449E-A33B-812DC283330B}" type="datetimeFigureOut">
               <a:rPr lang="en-US" smtClean="0"/>
-              <a:t>8/27/2026</a:t>
             </a:fld>
             <a:endParaRPr lang="en-US"/>
           </a:p>
@@ -1875,18 +1844,12 @@
           <a:p>
             <a:fld id="{C41D03B5-021B-42A0-8C9C-7110F2DC2D7F}" type="slidenum">
               <a:rPr lang="en-US" smtClean="0"/>
-              <a:t>‹#›</a:t>
             </a:fld>
             <a:endParaRPr lang="en-US"/>
           </a:p>
         </p:txBody>
       </p:sp>
     </p:spTree>
-    <p:extLst>
-      <p:ext uri="{BB962C8B-B14F-4D97-AF65-F5344CB8AC3E}">
-        <p14:creationId xmlns:p14="http://schemas.microsoft.com/office/powerpoint/2010/main" val="513448770"/>
-      </p:ext>
-    </p:extLst>
   </p:cSld>
   <p:clrMapOvr>
     <a:masterClrMapping/>
@@ -1996,6 +1959,7 @@
               <a:rPr lang="en-US" smtClean="0"/>
               <a:t>Click to edit Master text styles</a:t>
             </a:r>
+            <a:endParaRPr lang="en-US" smtClean="0"/>
           </a:p>
           <a:p>
             <a:pPr lvl="1"/>
@@ -2003,6 +1967,7 @@
               <a:rPr lang="en-US" smtClean="0"/>
               <a:t>Second level</a:t>
             </a:r>
+            <a:endParaRPr lang="en-US" smtClean="0"/>
           </a:p>
           <a:p>
             <a:pPr lvl="2"/>
@@ -2010,6 +1975,7 @@
               <a:rPr lang="en-US" smtClean="0"/>
               <a:t>Third level</a:t>
             </a:r>
+            <a:endParaRPr lang="en-US" smtClean="0"/>
           </a:p>
           <a:p>
             <a:pPr lvl="3"/>
@@ -2017,6 +1983,7 @@
               <a:rPr lang="en-US" smtClean="0"/>
               <a:t>Fourth level</a:t>
             </a:r>
+            <a:endParaRPr lang="en-US" smtClean="0"/>
           </a:p>
           <a:p>
             <a:pPr lvl="4"/>
@@ -2090,6 +2057,7 @@
               <a:rPr lang="en-US" smtClean="0"/>
               <a:t>Click to edit Master text styles</a:t>
             </a:r>
+            <a:endParaRPr lang="en-US" smtClean="0"/>
           </a:p>
         </p:txBody>
       </p:sp>
@@ -2110,7 +2078,6 @@
           <a:p>
             <a:fld id="{F159289A-40E8-449E-A33B-812DC283330B}" type="datetimeFigureOut">
               <a:rPr lang="en-US" smtClean="0"/>
-              <a:t>8/27/2026</a:t>
             </a:fld>
             <a:endParaRPr lang="en-US"/>
           </a:p>
@@ -2152,18 +2119,12 @@
           <a:p>
             <a:fld id="{C41D03B5-021B-42A0-8C9C-7110F2DC2D7F}" type="slidenum">
               <a:rPr lang="en-US" smtClean="0"/>
-              <a:t>‹#›</a:t>
             </a:fld>
             <a:endParaRPr lang="en-US"/>
           </a:p>
         </p:txBody>
       </p:sp>
     </p:spTree>
-    <p:extLst>
-      <p:ext uri="{BB962C8B-B14F-4D97-AF65-F5344CB8AC3E}">
-        <p14:creationId xmlns:p14="http://schemas.microsoft.com/office/powerpoint/2010/main" val="245862240"/>
-      </p:ext>
-    </p:extLst>
   </p:cSld>
   <p:clrMapOvr>
     <a:masterClrMapping/>
@@ -2343,6 +2304,7 @@
               <a:rPr lang="en-US" smtClean="0"/>
               <a:t>Click to edit Master text styles</a:t>
             </a:r>
+            <a:endParaRPr lang="en-US" smtClean="0"/>
           </a:p>
         </p:txBody>
       </p:sp>
@@ -2363,7 +2325,6 @@
           <a:p>
             <a:fld id="{F159289A-40E8-449E-A33B-812DC283330B}" type="datetimeFigureOut">
               <a:rPr lang="en-US" smtClean="0"/>
-              <a:t>8/27/2026</a:t>
             </a:fld>
             <a:endParaRPr lang="en-US"/>
           </a:p>
@@ -2405,18 +2366,12 @@
           <a:p>
             <a:fld id="{C41D03B5-021B-42A0-8C9C-7110F2DC2D7F}" type="slidenum">
               <a:rPr lang="en-US" smtClean="0"/>
-              <a:t>‹#›</a:t>
             </a:fld>
             <a:endParaRPr lang="en-US"/>
           </a:p>
         </p:txBody>
       </p:sp>
     </p:spTree>
-    <p:extLst>
-      <p:ext uri="{BB962C8B-B14F-4D97-AF65-F5344CB8AC3E}">
-        <p14:creationId xmlns:p14="http://schemas.microsoft.com/office/powerpoint/2010/main" val="519910749"/>
-      </p:ext>
-    </p:extLst>
   </p:cSld>
   <p:clrMapOvr>
     <a:masterClrMapping/>
@@ -2509,6 +2464,7 @@
               <a:rPr lang="en-US" smtClean="0"/>
               <a:t>Click to edit Master text styles</a:t>
             </a:r>
+            <a:endParaRPr lang="en-US" smtClean="0"/>
           </a:p>
           <a:p>
             <a:pPr lvl="1"/>
@@ -2516,6 +2472,7 @@
               <a:rPr lang="en-US" smtClean="0"/>
               <a:t>Second level</a:t>
             </a:r>
+            <a:endParaRPr lang="en-US" smtClean="0"/>
           </a:p>
           <a:p>
             <a:pPr lvl="2"/>
@@ -2523,6 +2480,7 @@
               <a:rPr lang="en-US" smtClean="0"/>
               <a:t>Third level</a:t>
             </a:r>
+            <a:endParaRPr lang="en-US" smtClean="0"/>
           </a:p>
           <a:p>
             <a:pPr lvl="3"/>
@@ -2530,6 +2488,7 @@
               <a:rPr lang="en-US" smtClean="0"/>
               <a:t>Fourth level</a:t>
             </a:r>
+            <a:endParaRPr lang="en-US" smtClean="0"/>
           </a:p>
           <a:p>
             <a:pPr lvl="4"/>
@@ -2576,7 +2535,6 @@
           <a:p>
             <a:fld id="{F159289A-40E8-449E-A33B-812DC283330B}" type="datetimeFigureOut">
               <a:rPr lang="en-US" smtClean="0"/>
-              <a:t>8/27/2026</a:t>
             </a:fld>
             <a:endParaRPr lang="en-US"/>
           </a:p>
@@ -2654,18 +2612,12 @@
           <a:p>
             <a:fld id="{C41D03B5-021B-42A0-8C9C-7110F2DC2D7F}" type="slidenum">
               <a:rPr lang="en-US" smtClean="0"/>
-              <a:t>‹#›</a:t>
             </a:fld>
             <a:endParaRPr lang="en-US"/>
           </a:p>
         </p:txBody>
       </p:sp>
     </p:spTree>
-    <p:extLst>
-      <p:ext uri="{BB962C8B-B14F-4D97-AF65-F5344CB8AC3E}">
-        <p14:creationId xmlns:p14="http://schemas.microsoft.com/office/powerpoint/2010/main" val="2268995692"/>
-      </p:ext>
-    </p:extLst>
   </p:cSld>
   <p:clrMap bg1="lt1" tx1="dk1" bg2="lt2" tx2="dk2" accent1="accent1" accent2="accent2" accent3="accent3" accent4="accent4" accent5="accent5" accent6="accent6" hlink="hlink" folHlink="folHlink"/>
   <p:sldLayoutIdLst>
@@ -2709,7 +2661,7 @@
         <a:spcBef>
           <a:spcPts val="1000"/>
         </a:spcBef>
-        <a:buFont typeface="Arial" panose="020B0604020202020204" pitchFamily="34" charset="0"/>
+        <a:buFont typeface="Arial" panose="02080604020202020204" pitchFamily="34" charset="0"/>
         <a:buChar char="•"/>
         <a:defRPr sz="2800" kern="1200">
           <a:solidFill>
@@ -2727,7 +2679,7 @@
         <a:spcBef>
           <a:spcPts val="500"/>
         </a:spcBef>
-        <a:buFont typeface="Arial" panose="020B0604020202020204" pitchFamily="34" charset="0"/>
+        <a:buFont typeface="Arial" panose="02080604020202020204" pitchFamily="34" charset="0"/>
         <a:buChar char="•"/>
         <a:defRPr sz="2400" kern="1200">
           <a:solidFill>
@@ -2745,7 +2697,7 @@
         <a:spcBef>
           <a:spcPts val="500"/>
         </a:spcBef>
-        <a:buFont typeface="Arial" panose="020B0604020202020204" pitchFamily="34" charset="0"/>
+        <a:buFont typeface="Arial" panose="02080604020202020204" pitchFamily="34" charset="0"/>
         <a:buChar char="•"/>
         <a:defRPr sz="2000" kern="1200">
           <a:solidFill>
@@ -2763,7 +2715,7 @@
         <a:spcBef>
           <a:spcPts val="500"/>
         </a:spcBef>
-        <a:buFont typeface="Arial" panose="020B0604020202020204" pitchFamily="34" charset="0"/>
+        <a:buFont typeface="Arial" panose="02080604020202020204" pitchFamily="34" charset="0"/>
         <a:buChar char="•"/>
         <a:defRPr sz="1800" kern="1200">
           <a:solidFill>
@@ -2781,7 +2733,7 @@
         <a:spcBef>
           <a:spcPts val="500"/>
         </a:spcBef>
-        <a:buFont typeface="Arial" panose="020B0604020202020204" pitchFamily="34" charset="0"/>
+        <a:buFont typeface="Arial" panose="02080604020202020204" pitchFamily="34" charset="0"/>
         <a:buChar char="•"/>
         <a:defRPr sz="1800" kern="1200">
           <a:solidFill>
@@ -2799,7 +2751,7 @@
         <a:spcBef>
           <a:spcPts val="500"/>
         </a:spcBef>
-        <a:buFont typeface="Arial" panose="020B0604020202020204" pitchFamily="34" charset="0"/>
+        <a:buFont typeface="Arial" panose="02080604020202020204" pitchFamily="34" charset="0"/>
         <a:buChar char="•"/>
         <a:defRPr sz="1800" kern="1200">
           <a:solidFill>
@@ -2817,7 +2769,7 @@
         <a:spcBef>
           <a:spcPts val="500"/>
         </a:spcBef>
-        <a:buFont typeface="Arial" panose="020B0604020202020204" pitchFamily="34" charset="0"/>
+        <a:buFont typeface="Arial" panose="02080604020202020204" pitchFamily="34" charset="0"/>
         <a:buChar char="•"/>
         <a:defRPr sz="1800" kern="1200">
           <a:solidFill>
@@ -2835,7 +2787,7 @@
         <a:spcBef>
           <a:spcPts val="500"/>
         </a:spcBef>
-        <a:buFont typeface="Arial" panose="020B0604020202020204" pitchFamily="34" charset="0"/>
+        <a:buFont typeface="Arial" panose="02080604020202020204" pitchFamily="34" charset="0"/>
         <a:buChar char="•"/>
         <a:defRPr sz="1800" kern="1200">
           <a:solidFill>
@@ -2853,7 +2805,7 @@
         <a:spcBef>
           <a:spcPts val="500"/>
         </a:spcBef>
-        <a:buFont typeface="Arial" panose="020B0604020202020204" pitchFamily="34" charset="0"/>
+        <a:buFont typeface="Arial" panose="02080604020202020204" pitchFamily="34" charset="0"/>
         <a:buChar char="•"/>
         <a:defRPr sz="1800" kern="1200">
           <a:solidFill>
@@ -3040,11 +2992,6 @@
         </p:txBody>
       </p:sp>
     </p:spTree>
-    <p:extLst>
-      <p:ext uri="{BB962C8B-B14F-4D97-AF65-F5344CB8AC3E}">
-        <p14:creationId xmlns:p14="http://schemas.microsoft.com/office/powerpoint/2010/main" val="1995923699"/>
-      </p:ext>
-    </p:extLst>
   </p:cSld>
   <p:clrMapOvr>
     <a:masterClrMapping/>
@@ -3095,6 +3042,7 @@
               <a:rPr lang="en-US" dirty="0"/>
               <a:t>K-D Trees</a:t>
             </a:r>
+            <a:endParaRPr lang="en-US" dirty="0"/>
           </a:p>
         </p:txBody>
       </p:sp>
@@ -3133,33 +3081,32 @@
               <a:rPr lang="en-IN" dirty="0"/>
               <a:t> is the number of points.</a:t>
             </a:r>
+            <a:endParaRPr lang="en-IN" dirty="0"/>
           </a:p>
           <a:p>
             <a:r>
               <a:rPr lang="en-IN" dirty="0"/>
               <a:t>Each node in the tree contains a k-dimensional point and pointers to the left and right child nodes.</a:t>
             </a:r>
+            <a:endParaRPr lang="en-IN" dirty="0"/>
           </a:p>
           <a:p>
             <a:r>
               <a:rPr lang="en-IN" dirty="0"/>
               <a:t>The choice of the axis at each level of the tree follows a cycle through the axes.</a:t>
             </a:r>
+            <a:endParaRPr lang="en-IN" dirty="0"/>
           </a:p>
           <a:p>
             <a:r>
               <a:rPr lang="en-IN" dirty="0"/>
               <a:t>And choice of axis at each level will affect's the tree's performance in terms of search speed.</a:t>
             </a:r>
+            <a:endParaRPr lang="en-IN" dirty="0"/>
           </a:p>
         </p:txBody>
       </p:sp>
     </p:spTree>
-    <p:extLst>
-      <p:ext uri="{BB962C8B-B14F-4D97-AF65-F5344CB8AC3E}">
-        <p14:creationId xmlns:p14="http://schemas.microsoft.com/office/powerpoint/2010/main" val="1598167042"/>
-      </p:ext>
-    </p:extLst>
   </p:cSld>
   <p:clrMapOvr>
     <a:masterClrMapping/>
@@ -3214,6 +3161,7 @@
               <a:rPr lang="en-US" dirty="0"/>
               <a:t>K-D Trees</a:t>
             </a:r>
+            <a:endParaRPr lang="en-US" dirty="0"/>
           </a:p>
         </p:txBody>
       </p:sp>
@@ -3244,18 +3192,21 @@
               <a:rPr lang="en-IN" dirty="0"/>
               <a:t>the axis of the splitting plane.</a:t>
             </a:r>
+            <a:endParaRPr lang="en-IN" dirty="0"/>
           </a:p>
           <a:p>
             <a:r>
               <a:rPr lang="en-IN" dirty="0"/>
               <a:t>Choose the median as the pivot element.</a:t>
             </a:r>
+            <a:endParaRPr lang="en-IN" dirty="0"/>
           </a:p>
           <a:p>
             <a:r>
               <a:rPr lang="en-IN" dirty="0"/>
               <a:t>Split the points into two sets: one set contains points less than the median and the other set contains points greater than the median.</a:t>
             </a:r>
+            <a:endParaRPr lang="en-IN" dirty="0"/>
           </a:p>
           <a:p>
             <a:r>
@@ -3270,15 +3221,11 @@
               <a:rPr lang="en-IN" dirty="0"/>
               <a:t>.</a:t>
             </a:r>
+            <a:endParaRPr lang="en-IN" dirty="0"/>
           </a:p>
         </p:txBody>
       </p:sp>
     </p:spTree>
-    <p:extLst>
-      <p:ext uri="{BB962C8B-B14F-4D97-AF65-F5344CB8AC3E}">
-        <p14:creationId xmlns:p14="http://schemas.microsoft.com/office/powerpoint/2010/main" val="1975131594"/>
-      </p:ext>
-    </p:extLst>
   </p:cSld>
   <p:clrMapOvr>
     <a:masterClrMapping/>
@@ -3329,6 +3276,7 @@
               <a:rPr lang="en-IN" dirty="0"/>
               <a:t>Delete Operation on K-D Trees</a:t>
             </a:r>
+            <a:endParaRPr lang="en-IN" dirty="0"/>
           </a:p>
         </p:txBody>
       </p:sp>
@@ -3355,18 +3303,21 @@
               <a:rPr lang="en-IN" dirty="0"/>
               <a:t>the node to be deleted.</a:t>
             </a:r>
+            <a:endParaRPr lang="en-IN" dirty="0"/>
           </a:p>
           <a:p>
             <a:r>
               <a:rPr lang="en-IN" dirty="0"/>
               <a:t>If the node is a leaf node, delete it directly.</a:t>
             </a:r>
+            <a:endParaRPr lang="en-IN" dirty="0"/>
           </a:p>
           <a:p>
             <a:r>
               <a:rPr lang="en-IN" dirty="0"/>
               <a:t>If the node has only one child, replace the node with its child.</a:t>
             </a:r>
+            <a:endParaRPr lang="en-IN" dirty="0"/>
           </a:p>
           <a:p>
             <a:r>
@@ -3397,15 +3348,11 @@
               <a:rPr lang="en-IN" dirty="0"/>
               <a:t> successor.</a:t>
             </a:r>
+            <a:endParaRPr lang="en-IN" dirty="0"/>
           </a:p>
         </p:txBody>
       </p:sp>
     </p:spTree>
-    <p:extLst>
-      <p:ext uri="{BB962C8B-B14F-4D97-AF65-F5344CB8AC3E}">
-        <p14:creationId xmlns:p14="http://schemas.microsoft.com/office/powerpoint/2010/main" val="961940602"/>
-      </p:ext>
-    </p:extLst>
   </p:cSld>
   <p:clrMapOvr>
     <a:masterClrMapping/>
@@ -3460,6 +3407,7 @@
               <a:rPr lang="en-US" dirty="0"/>
               <a:t>trees</a:t>
             </a:r>
+            <a:endParaRPr lang="en-US" dirty="0"/>
           </a:p>
         </p:txBody>
       </p:sp>
@@ -3511,11 +3459,6 @@
         </p:txBody>
       </p:sp>
     </p:spTree>
-    <p:extLst>
-      <p:ext uri="{BB962C8B-B14F-4D97-AF65-F5344CB8AC3E}">
-        <p14:creationId xmlns:p14="http://schemas.microsoft.com/office/powerpoint/2010/main" val="3560548543"/>
-      </p:ext>
-    </p:extLst>
   </p:cSld>
   <p:clrMapOvr>
     <a:masterClrMapping/>
@@ -3593,6 +3536,7 @@
               <a:rPr lang="en-IN" dirty="0" smtClean="0"/>
               <a:t>advanced tree-based data structures optimized for specific types of data, storage systems, or query operations beyond standard binary search trees (BSTs).</a:t>
             </a:r>
+            <a:endParaRPr lang="en-IN" dirty="0" smtClean="0"/>
           </a:p>
           <a:p>
             <a:r>
@@ -3605,12 +3549,9 @@
             </a:r>
             <a:r>
               <a:rPr lang="en-IN" dirty="0" smtClean="0"/>
-              <a:t> is a randomized data structure that combines a binary search tree (BST) and a binary heap</a:t>
-            </a:r>
-            <a:r>
-              <a:rPr lang="en-IN" dirty="0" smtClean="0"/>
-              <a:t>.</a:t>
-            </a:r>
+              <a:t> is a randomized data structure that combines a binary search tree (BST) and a binary heap.</a:t>
+            </a:r>
+            <a:endParaRPr lang="en-IN" dirty="0" smtClean="0"/>
           </a:p>
           <a:p>
             <a:r>
@@ -3629,11 +3570,6 @@
         </p:txBody>
       </p:sp>
     </p:spTree>
-    <p:extLst>
-      <p:ext uri="{BB962C8B-B14F-4D97-AF65-F5344CB8AC3E}">
-        <p14:creationId xmlns:p14="http://schemas.microsoft.com/office/powerpoint/2010/main" val="3456483739"/>
-      </p:ext>
-    </p:extLst>
   </p:cSld>
   <p:clrMapOvr>
     <a:masterClrMapping/>
@@ -3795,11 +3731,6 @@
         </p:txBody>
       </p:sp>
     </p:spTree>
-    <p:extLst>
-      <p:ext uri="{BB962C8B-B14F-4D97-AF65-F5344CB8AC3E}">
-        <p14:creationId xmlns:p14="http://schemas.microsoft.com/office/powerpoint/2010/main" val="3521157050"/>
-      </p:ext>
-    </p:extLst>
   </p:cSld>
   <p:clrMapOvr>
     <a:masterClrMapping/>
@@ -3930,6 +3861,7 @@
               <a:rPr lang="en-IN" dirty="0" smtClean="0"/>
               <a:t>.</a:t>
             </a:r>
+            <a:endParaRPr lang="en-IN" dirty="0" smtClean="0"/>
           </a:p>
           <a:p>
             <a:pPr marL="514350" indent="-514350">
@@ -3992,11 +3924,6 @@
         </p:txBody>
       </p:sp>
     </p:spTree>
-    <p:extLst>
-      <p:ext uri="{BB962C8B-B14F-4D97-AF65-F5344CB8AC3E}">
-        <p14:creationId xmlns:p14="http://schemas.microsoft.com/office/powerpoint/2010/main" val="3918935574"/>
-      </p:ext>
-    </p:extLst>
   </p:cSld>
   <p:clrMapOvr>
     <a:masterClrMapping/>
@@ -4047,6 +3974,7 @@
               <a:rPr lang="en-US" dirty="0"/>
               <a:t>Skip List</a:t>
             </a:r>
+            <a:endParaRPr lang="en-US" dirty="0"/>
           </a:p>
         </p:txBody>
       </p:sp>
@@ -4103,6 +4031,7 @@
               <a:rPr lang="en-IN" dirty="0" smtClean="0"/>
               <a:t>list.</a:t>
             </a:r>
+            <a:endParaRPr lang="en-IN" dirty="0" smtClean="0"/>
           </a:p>
           <a:p>
             <a:r>
@@ -4118,11 +4047,6 @@
         </p:txBody>
       </p:sp>
     </p:spTree>
-    <p:extLst>
-      <p:ext uri="{BB962C8B-B14F-4D97-AF65-F5344CB8AC3E}">
-        <p14:creationId xmlns:p14="http://schemas.microsoft.com/office/powerpoint/2010/main" val="3700605824"/>
-      </p:ext>
-    </p:extLst>
   </p:cSld>
   <p:clrMapOvr>
     <a:masterClrMapping/>
@@ -4173,6 +4097,7 @@
               <a:rPr lang="en-US" dirty="0"/>
               <a:t>Representation of Skip List</a:t>
             </a:r>
+            <a:endParaRPr lang="en-US" dirty="0"/>
           </a:p>
         </p:txBody>
       </p:sp>
@@ -4206,6 +4131,7 @@
               <a:rPr lang="en-IN" dirty="0" smtClean="0"/>
               <a:t>.</a:t>
             </a:r>
+            <a:endParaRPr lang="en-IN" dirty="0" smtClean="0"/>
           </a:p>
           <a:p>
             <a:r>
@@ -4250,6 +4176,7 @@
               <a:rPr lang="en-IN" dirty="0"/>
               <a:t> as we can only linearly traverse the list and cannot skip nodes while searching.</a:t>
             </a:r>
+            <a:endParaRPr lang="en-IN" dirty="0"/>
           </a:p>
           <a:p>
             <a:r>
@@ -4280,6 +4207,7 @@
               <a:rPr lang="en-IN" dirty="0"/>
               <a:t>.</a:t>
             </a:r>
+            <a:endParaRPr lang="en-IN" dirty="0"/>
           </a:p>
           <a:p>
             <a:r>
@@ -4318,12 +4246,14 @@
               <a:rPr lang="en-IN" dirty="0"/>
               <a:t>.</a:t>
             </a:r>
+            <a:endParaRPr lang="en-IN" dirty="0"/>
           </a:p>
           <a:p>
             <a:r>
               <a:rPr lang="en-IN" dirty="0"/>
               <a:t>We can do similar things by augmenting list as Skip List.</a:t>
             </a:r>
+            <a:endParaRPr lang="en-IN" dirty="0"/>
           </a:p>
           <a:p>
             <a:endParaRPr lang="en-US" dirty="0"/>
@@ -4331,11 +4261,6 @@
         </p:txBody>
       </p:sp>
     </p:spTree>
-    <p:extLst>
-      <p:ext uri="{BB962C8B-B14F-4D97-AF65-F5344CB8AC3E}">
-        <p14:creationId xmlns:p14="http://schemas.microsoft.com/office/powerpoint/2010/main" val="3397710088"/>
-      </p:ext>
-    </p:extLst>
   </p:cSld>
   <p:clrMapOvr>
     <a:masterClrMapping/>
@@ -4414,7 +4339,7 @@
           <p:nvPr/>
         </p:nvPicPr>
         <p:blipFill>
-          <a:blip r:embed="rId2"/>
+          <a:blip r:embed="rId1"/>
           <a:stretch>
             <a:fillRect/>
           </a:stretch>
@@ -4430,11 +4355,6 @@
         </p:spPr>
       </p:pic>
     </p:spTree>
-    <p:extLst>
-      <p:ext uri="{BB962C8B-B14F-4D97-AF65-F5344CB8AC3E}">
-        <p14:creationId xmlns:p14="http://schemas.microsoft.com/office/powerpoint/2010/main" val="762703626"/>
-      </p:ext>
-    </p:extLst>
   </p:cSld>
   <p:clrMapOvr>
     <a:masterClrMapping/>
@@ -4541,9 +4461,6 @@
         </p:spPr>
         <p:txBody>
           <a:bodyPr vert="horz" wrap="square" lIns="0" tIns="45720" rIns="0" bIns="45720" numCol="1" anchor="ctr" anchorCtr="0" compatLnSpc="1">
-            <a:prstTxWarp prst="textNoShape">
-              <a:avLst/>
-            </a:prstTxWarp>
             <a:spAutoFit/>
           </a:bodyPr>
           <a:lstStyle/>
@@ -4562,7 +4479,6 @@
               <a:buSzTx/>
               <a:buFontTx/>
               <a:buNone/>
-              <a:tabLst/>
             </a:pPr>
             <a:endParaRPr kumimoji="0" lang="en-US" sz="3200" b="0" i="0" u="none" strike="noStrike" cap="none" normalizeH="0" baseline="0" dirty="0" smtClean="0">
               <a:ln>
@@ -4591,7 +4507,6 @@
               <a:buSzTx/>
               <a:buFontTx/>
               <a:buChar char="•"/>
-              <a:tabLst/>
             </a:pPr>
             <a:r>
               <a:rPr kumimoji="0" lang="en-US" sz="3200" b="0" i="0" u="none" strike="noStrike" cap="none" normalizeH="0" baseline="0" dirty="0" smtClean="0">
@@ -4607,6 +4522,17 @@
               </a:rPr>
               <a:t>Create a Node structure, with key, value, and an array of pointers.</a:t>
             </a:r>
+            <a:endParaRPr kumimoji="0" lang="en-US" sz="3200" b="0" i="0" u="none" strike="noStrike" cap="none" normalizeH="0" baseline="0" dirty="0" smtClean="0">
+              <a:ln>
+                <a:noFill/>
+              </a:ln>
+              <a:solidFill>
+                <a:srgbClr val="374151"/>
+              </a:solidFill>
+              <a:effectLst/>
+              <a:latin typeface="Times New Roman" panose="02020603050405020304" pitchFamily="18" charset="0"/>
+              <a:cs typeface="Times New Roman" panose="02020603050405020304" pitchFamily="18" charset="0"/>
+            </a:endParaRPr>
           </a:p>
           <a:p>
             <a:pPr marL="0" marR="0" lvl="0" indent="0" algn="l" defTabSz="914400" rtl="0" eaLnBrk="0" fontAlgn="base" latinLnBrk="0" hangingPunct="0">
@@ -4623,7 +4549,6 @@
               <a:buSzTx/>
               <a:buFontTx/>
               <a:buChar char="•"/>
-              <a:tabLst/>
             </a:pPr>
             <a:r>
               <a:rPr kumimoji="0" lang="en-US" sz="3200" b="0" i="0" u="none" strike="noStrike" cap="none" normalizeH="0" baseline="0" dirty="0" smtClean="0">
@@ -4667,6 +4592,17 @@
               </a:rPr>
               <a:t> structure, with a head node and the level of the Skip List.</a:t>
             </a:r>
+            <a:endParaRPr kumimoji="0" lang="en-US" sz="3200" b="0" i="0" u="none" strike="noStrike" cap="none" normalizeH="0" baseline="0" dirty="0" smtClean="0">
+              <a:ln>
+                <a:noFill/>
+              </a:ln>
+              <a:solidFill>
+                <a:srgbClr val="374151"/>
+              </a:solidFill>
+              <a:effectLst/>
+              <a:latin typeface="Times New Roman" panose="02020603050405020304" pitchFamily="18" charset="0"/>
+              <a:cs typeface="Times New Roman" panose="02020603050405020304" pitchFamily="18" charset="0"/>
+            </a:endParaRPr>
           </a:p>
           <a:p>
             <a:pPr marL="0" marR="0" lvl="0" indent="0" algn="l" defTabSz="914400" rtl="0" eaLnBrk="0" fontAlgn="base" latinLnBrk="0" hangingPunct="0">
@@ -4683,7 +4619,6 @@
               <a:buSzTx/>
               <a:buFontTx/>
               <a:buChar char="•"/>
-              <a:tabLst/>
             </a:pPr>
             <a:r>
               <a:rPr kumimoji="0" lang="en-US" sz="3200" b="0" i="0" u="none" strike="noStrike" cap="none" normalizeH="0" baseline="0" dirty="0" smtClean="0">
@@ -4699,6 +4634,17 @@
               </a:rPr>
               <a:t>Create a function to create a new node.</a:t>
             </a:r>
+            <a:endParaRPr kumimoji="0" lang="en-US" sz="3200" b="0" i="0" u="none" strike="noStrike" cap="none" normalizeH="0" baseline="0" dirty="0" smtClean="0">
+              <a:ln>
+                <a:noFill/>
+              </a:ln>
+              <a:solidFill>
+                <a:srgbClr val="374151"/>
+              </a:solidFill>
+              <a:effectLst/>
+              <a:latin typeface="Times New Roman" panose="02020603050405020304" pitchFamily="18" charset="0"/>
+              <a:cs typeface="Times New Roman" panose="02020603050405020304" pitchFamily="18" charset="0"/>
+            </a:endParaRPr>
           </a:p>
           <a:p>
             <a:pPr marL="0" marR="0" lvl="0" indent="0" algn="l" defTabSz="914400" rtl="0" eaLnBrk="0" fontAlgn="base" latinLnBrk="0" hangingPunct="0">
@@ -4715,7 +4661,6 @@
               <a:buSzTx/>
               <a:buFontTx/>
               <a:buChar char="•"/>
-              <a:tabLst/>
             </a:pPr>
             <a:r>
               <a:rPr kumimoji="0" lang="en-US" sz="3200" b="0" i="0" u="none" strike="noStrike" cap="none" normalizeH="0" baseline="0" dirty="0" smtClean="0">
@@ -4731,6 +4676,17 @@
               </a:rPr>
               <a:t>Create a function to create a new Skip List.</a:t>
             </a:r>
+            <a:endParaRPr kumimoji="0" lang="en-US" sz="3200" b="0" i="0" u="none" strike="noStrike" cap="none" normalizeH="0" baseline="0" dirty="0" smtClean="0">
+              <a:ln>
+                <a:noFill/>
+              </a:ln>
+              <a:solidFill>
+                <a:srgbClr val="374151"/>
+              </a:solidFill>
+              <a:effectLst/>
+              <a:latin typeface="Times New Roman" panose="02020603050405020304" pitchFamily="18" charset="0"/>
+              <a:cs typeface="Times New Roman" panose="02020603050405020304" pitchFamily="18" charset="0"/>
+            </a:endParaRPr>
           </a:p>
           <a:p>
             <a:pPr marL="0" marR="0" lvl="0" indent="0" algn="l" defTabSz="914400" rtl="0" eaLnBrk="0" fontAlgn="base" latinLnBrk="0" hangingPunct="0">
@@ -4747,7 +4703,6 @@
               <a:buSzTx/>
               <a:buFontTx/>
               <a:buChar char="•"/>
-              <a:tabLst/>
             </a:pPr>
             <a:r>
               <a:rPr kumimoji="0" lang="en-US" sz="3200" b="0" i="0" u="none" strike="noStrike" cap="none" normalizeH="0" baseline="0" dirty="0" smtClean="0">
@@ -4763,6 +4718,17 @@
               </a:rPr>
               <a:t>Create a function to generate a random level for a node.</a:t>
             </a:r>
+            <a:endParaRPr kumimoji="0" lang="en-US" sz="3200" b="0" i="0" u="none" strike="noStrike" cap="none" normalizeH="0" baseline="0" dirty="0" smtClean="0">
+              <a:ln>
+                <a:noFill/>
+              </a:ln>
+              <a:solidFill>
+                <a:srgbClr val="374151"/>
+              </a:solidFill>
+              <a:effectLst/>
+              <a:latin typeface="Times New Roman" panose="02020603050405020304" pitchFamily="18" charset="0"/>
+              <a:cs typeface="Times New Roman" panose="02020603050405020304" pitchFamily="18" charset="0"/>
+            </a:endParaRPr>
           </a:p>
           <a:p>
             <a:pPr marL="0" marR="0" lvl="0" indent="0" algn="l" defTabSz="914400" rtl="0" eaLnBrk="0" fontAlgn="base" latinLnBrk="0" hangingPunct="0">
@@ -4779,7 +4745,6 @@
               <a:buSzTx/>
               <a:buFontTx/>
               <a:buChar char="•"/>
-              <a:tabLst/>
             </a:pPr>
             <a:r>
               <a:rPr kumimoji="0" lang="en-US" sz="3200" b="0" i="0" u="none" strike="noStrike" cap="none" normalizeH="0" baseline="0" dirty="0" smtClean="0">
@@ -4795,6 +4760,17 @@
               </a:rPr>
               <a:t>Create a function to insert a node into the Skip List.</a:t>
             </a:r>
+            <a:endParaRPr kumimoji="0" lang="en-US" sz="3200" b="0" i="0" u="none" strike="noStrike" cap="none" normalizeH="0" baseline="0" dirty="0" smtClean="0">
+              <a:ln>
+                <a:noFill/>
+              </a:ln>
+              <a:solidFill>
+                <a:srgbClr val="374151"/>
+              </a:solidFill>
+              <a:effectLst/>
+              <a:latin typeface="Times New Roman" panose="02020603050405020304" pitchFamily="18" charset="0"/>
+              <a:cs typeface="Times New Roman" panose="02020603050405020304" pitchFamily="18" charset="0"/>
+            </a:endParaRPr>
           </a:p>
           <a:p>
             <a:pPr marL="0" marR="0" lvl="0" indent="0" algn="l" defTabSz="914400" rtl="0" eaLnBrk="0" fontAlgn="base" latinLnBrk="0" hangingPunct="0">
@@ -4811,7 +4787,6 @@
               <a:buSzTx/>
               <a:buFontTx/>
               <a:buChar char="•"/>
-              <a:tabLst/>
             </a:pPr>
             <a:r>
               <a:rPr kumimoji="0" lang="en-US" sz="3200" b="0" i="0" u="none" strike="noStrike" cap="none" normalizeH="0" baseline="0" dirty="0" smtClean="0">
@@ -4827,6 +4802,17 @@
               </a:rPr>
               <a:t>Create a function to display the Skip List.</a:t>
             </a:r>
+            <a:endParaRPr kumimoji="0" lang="en-US" sz="3200" b="0" i="0" u="none" strike="noStrike" cap="none" normalizeH="0" baseline="0" dirty="0" smtClean="0">
+              <a:ln>
+                <a:noFill/>
+              </a:ln>
+              <a:solidFill>
+                <a:srgbClr val="374151"/>
+              </a:solidFill>
+              <a:effectLst/>
+              <a:latin typeface="Times New Roman" panose="02020603050405020304" pitchFamily="18" charset="0"/>
+              <a:cs typeface="Times New Roman" panose="02020603050405020304" pitchFamily="18" charset="0"/>
+            </a:endParaRPr>
           </a:p>
           <a:p>
             <a:pPr marL="0" marR="0" lvl="0" indent="0" algn="l" defTabSz="914400" rtl="0" eaLnBrk="0" fontAlgn="base" latinLnBrk="0" hangingPunct="0">
@@ -4843,7 +4829,6 @@
               <a:buSzTx/>
               <a:buFontTx/>
               <a:buChar char="•"/>
-              <a:tabLst/>
             </a:pPr>
             <a:r>
               <a:rPr kumimoji="0" lang="en-US" sz="3200" b="0" i="0" u="none" strike="noStrike" cap="none" normalizeH="0" baseline="0" dirty="0" smtClean="0">
@@ -4873,15 +4858,21 @@
               </a:rPr>
               <a:t> </a:t>
             </a:r>
+            <a:endParaRPr kumimoji="0" lang="en-US" sz="3200" b="0" i="0" u="none" strike="noStrike" cap="none" normalizeH="0" baseline="0" dirty="0" smtClean="0">
+              <a:ln>
+                <a:noFill/>
+              </a:ln>
+              <a:solidFill>
+                <a:schemeClr val="tx1"/>
+              </a:solidFill>
+              <a:effectLst/>
+              <a:latin typeface="Times New Roman" panose="02020603050405020304" pitchFamily="18" charset="0"/>
+              <a:cs typeface="Times New Roman" panose="02020603050405020304" pitchFamily="18" charset="0"/>
+            </a:endParaRPr>
           </a:p>
         </p:txBody>
       </p:sp>
     </p:spTree>
-    <p:extLst>
-      <p:ext uri="{BB962C8B-B14F-4D97-AF65-F5344CB8AC3E}">
-        <p14:creationId xmlns:p14="http://schemas.microsoft.com/office/powerpoint/2010/main" val="4018702120"/>
-      </p:ext>
-    </p:extLst>
   </p:cSld>
   <p:clrMapOvr>
     <a:masterClrMapping/>
@@ -4932,6 +4923,7 @@
               <a:rPr lang="en-US" dirty="0"/>
               <a:t>Multidimensional search trees</a:t>
             </a:r>
+            <a:endParaRPr lang="en-US" dirty="0"/>
           </a:p>
         </p:txBody>
       </p:sp>
@@ -4973,6 +4965,7 @@
               <a:rPr lang="en-IN" dirty="0" smtClean="0"/>
               <a:t>.</a:t>
             </a:r>
+            <a:endParaRPr lang="en-IN" dirty="0" smtClean="0"/>
           </a:p>
           <a:p>
             <a:r>
@@ -5018,6 +5011,7 @@
               <a:rPr lang="en-IN" dirty="0" smtClean="0"/>
               <a:t>.</a:t>
             </a:r>
+            <a:endParaRPr lang="en-IN" dirty="0" smtClean="0"/>
           </a:p>
           <a:p>
             <a:r>
@@ -5127,11 +5121,6 @@
         </p:txBody>
       </p:sp>
     </p:spTree>
-    <p:extLst>
-      <p:ext uri="{BB962C8B-B14F-4D97-AF65-F5344CB8AC3E}">
-        <p14:creationId xmlns:p14="http://schemas.microsoft.com/office/powerpoint/2010/main" val="3444205736"/>
-      </p:ext>
-    </p:extLst>
   </p:cSld>
   <p:clrMapOvr>
     <a:masterClrMapping/>
@@ -5189,7 +5178,7 @@
     </a:clrScheme>
     <a:fontScheme name="Office">
       <a:majorFont>
-        <a:latin typeface="Calibri Light" panose="020F0302020204030204"/>
+        <a:latin typeface="Calibri Light"/>
         <a:ea typeface=""/>
         <a:cs typeface=""/>
         <a:font script="Jpan" typeface="ＭＳ Ｐゴシック"/>
@@ -5224,7 +5213,7 @@
         <a:font script="Geor" typeface="Sylfaen"/>
       </a:majorFont>
       <a:minorFont>
-        <a:latin typeface="Calibri" panose="020F0502020204030204"/>
+        <a:latin typeface="Calibri"/>
         <a:ea typeface=""/>
         <a:cs typeface=""/>
         <a:font script="Jpan" typeface="ＭＳ Ｐゴシック"/>
@@ -5397,8 +5386,6 @@
       </a:bgFillStyleLst>
     </a:fmtScheme>
   </a:themeElements>
-  <a:objectDefaults/>
-  <a:extraClrSchemeLst/>
   <a:extLst>
     <a:ext uri="{05A4C25C-085E-4340-85A3-A5531E510DB2}">
       <thm15:themeFamily xmlns:thm15="http://schemas.microsoft.com/office/thememl/2012/main" name="Office Theme" id="{62F939B6-93AF-4DB8-9C6B-D6C7DFDC589F}" vid="{4A3C46E8-61CC-4603-A589-7422A47A8E4A}"/>
